--- a/dist/초1/국어/한글/초1_국어_한글_05_쌍자음과여러가지모음.pptx
+++ b/dist/초1/국어/한글/초1_국어_한글_05_쌍자음과여러가지모음.pptx
@@ -120,13 +120,13 @@
   <p:extLst>
     <p:ext uri="{521415D9-36F7-43E2-AB2F-B90AF26B5E84}">
       <p14:sectionLst xmlns:p14="http://schemas.microsoft.com/office/powerpoint/2010/main">
-        <p14:section name="도입" id="{749bbcdb-1870-faa5-9814-2f81208d7e02}">
+        <p14:section name="도입" id="{01aa75f5-1921-024f-8f4a-91232c3ca559}">
           <p14:sldIdLst>
             <p14:sldId id="256"/>
             <p14:sldId id="257"/>
           </p14:sldIdLst>
         </p14:section>
-        <p14:section name="개념" id="{234e90d2-a4ef-45a2-993b-c2b83b5be2fa}">
+        <p14:section name="개념" id="{09dc240a-3d10-52df-0e08-d8c07f370b13}">
           <p14:sldIdLst>
             <p14:sldId id="258"/>
             <p14:sldId id="259"/>
@@ -134,32 +134,32 @@
             <p14:sldId id="263"/>
           </p14:sldIdLst>
         </p14:section>
-        <p14:section name="연습" id="{fb47c82c-9eca-42d5-5d75-cf308f39b8b0}">
+        <p14:section name="연습" id="{ae319a3b-4d9d-fb64-767f-2a7e7f420eee}">
           <p14:sldIdLst>
             <p14:sldId id="260"/>
             <p14:sldId id="261"/>
             <p14:sldId id="264"/>
           </p14:sldIdLst>
         </p14:section>
-        <p14:section name="개념" id="{bb4bfc85-bc77-02b2-9c33-e88076909676}">
+        <p14:section name="개념" id="{376eb423-f3ed-2e18-8b0f-8e6784a63350}">
           <p14:sldIdLst/>
         </p14:section>
-        <p14:section name="연습" id="{17b2ea2b-a757-9475-d0df-eb034266d707}">
+        <p14:section name="연습" id="{1d342dc7-bac9-8dcc-40cb-5f96aeb1776d}">
           <p14:sldIdLst/>
         </p14:section>
-        <p14:section name="확인" id="{d2a88049-9386-2c8b-c8b2-bb137de32b2f}">
+        <p14:section name="확인" id="{59ec26ba-3f36-8379-736a-4a05863d00eb}">
           <p14:sldIdLst>
             <p14:sldId id="265"/>
             <p14:sldId id="266"/>
             <p14:sldId id="267"/>
           </p14:sldIdLst>
         </p14:section>
-        <p14:section name="정리" id="{d10eb2e2-393b-f63a-13a0-5df78d2fc998}">
+        <p14:section name="정리" id="{ae419b10-ec09-1206-9617-364504f27fda}">
           <p14:sldIdLst>
             <p14:sldId id="268"/>
           </p14:sldIdLst>
         </p14:section>
-        <p14:section name="보충" id="{1f2d1ce5-fcff-1e5d-0b07-08d529247999}">
+        <p14:section name="보충" id="{de5cb071-09e8-8ad7-91d3-200d59094947}">
           <p14:sldIdLst>
             <p14:sldId id="269"/>
           </p14:sldIdLst>

--- a/dist/초1/국어/한글/초1_국어_한글_05_쌍자음과여러가지모음.pptx
+++ b/dist/초1/국어/한글/초1_국어_한글_05_쌍자음과여러가지모음.pptx
@@ -120,13 +120,13 @@
   <p:extLst>
     <p:ext uri="{521415D9-36F7-43E2-AB2F-B90AF26B5E84}">
       <p14:sectionLst xmlns:p14="http://schemas.microsoft.com/office/powerpoint/2010/main">
-        <p14:section name="도입" id="{01aa75f5-1921-024f-8f4a-91232c3ca559}">
+        <p14:section name="도입" id="{2fbc4982-c03c-23f0-d67b-b8eebdcc1fee}">
           <p14:sldIdLst>
             <p14:sldId id="256"/>
             <p14:sldId id="257"/>
           </p14:sldIdLst>
         </p14:section>
-        <p14:section name="개념" id="{09dc240a-3d10-52df-0e08-d8c07f370b13}">
+        <p14:section name="개념" id="{7bfd9449-5240-d949-e64b-ac6cb159a4bf}">
           <p14:sldIdLst>
             <p14:sldId id="258"/>
             <p14:sldId id="259"/>
@@ -134,32 +134,32 @@
             <p14:sldId id="263"/>
           </p14:sldIdLst>
         </p14:section>
-        <p14:section name="연습" id="{ae319a3b-4d9d-fb64-767f-2a7e7f420eee}">
+        <p14:section name="연습" id="{58c8d5c2-f613-9f1f-8107-011f2f2347cd}">
           <p14:sldIdLst>
             <p14:sldId id="260"/>
             <p14:sldId id="261"/>
             <p14:sldId id="264"/>
           </p14:sldIdLst>
         </p14:section>
-        <p14:section name="개념" id="{376eb423-f3ed-2e18-8b0f-8e6784a63350}">
+        <p14:section name="개념" id="{7490b911-4188-0014-c3ef-819eb0557735}">
           <p14:sldIdLst/>
         </p14:section>
-        <p14:section name="연습" id="{1d342dc7-bac9-8dcc-40cb-5f96aeb1776d}">
+        <p14:section name="연습" id="{682738a0-a95f-4eeb-bbe7-356644af7adf}">
           <p14:sldIdLst/>
         </p14:section>
-        <p14:section name="확인" id="{59ec26ba-3f36-8379-736a-4a05863d00eb}">
+        <p14:section name="확인" id="{0224e71b-e518-0903-2b5d-239626b1e0b3}">
           <p14:sldIdLst>
             <p14:sldId id="265"/>
             <p14:sldId id="266"/>
             <p14:sldId id="267"/>
           </p14:sldIdLst>
         </p14:section>
-        <p14:section name="정리" id="{ae419b10-ec09-1206-9617-364504f27fda}">
+        <p14:section name="정리" id="{172323f7-aa78-a95f-847f-ada247fe1414}">
           <p14:sldIdLst>
             <p14:sldId id="268"/>
           </p14:sldIdLst>
         </p14:section>
-        <p14:section name="보충" id="{de5cb071-09e8-8ad7-91d3-200d59094947}">
+        <p14:section name="보충" id="{1db717bd-b834-4449-313e-8ffa448346c1}">
           <p14:sldIdLst>
             <p14:sldId id="269"/>
           </p14:sldIdLst>
@@ -3462,7 +3462,7 @@
         <p:spPr>
           <a:xfrm>
             <a:off x="1344168" y="2011680"/>
-            <a:ext cx="1965960" cy="1280160"/>
+            <a:ext cx="2606040" cy="1280160"/>
           </a:xfrm>
           <a:prstGeom prst="roundRect">
             <a:avLst>
@@ -3508,8 +3508,8 @@
         </p:nvSpPr>
         <p:spPr>
           <a:xfrm>
-            <a:off x="3584448" y="2011680"/>
-            <a:ext cx="1965960" cy="1280160"/>
+            <a:off x="4224528" y="2011680"/>
+            <a:ext cx="2606040" cy="1280160"/>
           </a:xfrm>
           <a:prstGeom prst="roundRect">
             <a:avLst>
@@ -3603,7 +3603,7 @@
         <p:spPr>
           <a:xfrm>
             <a:off x="1344168" y="3474720"/>
-            <a:ext cx="1965960" cy="1280160"/>
+            <a:ext cx="2606040" cy="1280160"/>
           </a:xfrm>
           <a:prstGeom prst="roundRect">
             <a:avLst>
@@ -3649,8 +3649,8 @@
         </p:nvSpPr>
         <p:spPr>
           <a:xfrm>
-            <a:off x="3584448" y="3474720"/>
-            <a:ext cx="1965960" cy="1280160"/>
+            <a:off x="4224528" y="3474720"/>
+            <a:ext cx="2606040" cy="1280160"/>
           </a:xfrm>
           <a:prstGeom prst="roundRect">
             <a:avLst>
@@ -3744,7 +3744,7 @@
         <p:spPr>
           <a:xfrm>
             <a:off x="1344168" y="4937760"/>
-            <a:ext cx="1965960" cy="1280160"/>
+            <a:ext cx="2606040" cy="1280160"/>
           </a:xfrm>
           <a:prstGeom prst="roundRect">
             <a:avLst>
@@ -3790,8 +3790,8 @@
         </p:nvSpPr>
         <p:spPr>
           <a:xfrm>
-            <a:off x="3584448" y="4937760"/>
-            <a:ext cx="1965960" cy="1280160"/>
+            <a:off x="4224528" y="4937760"/>
+            <a:ext cx="2606040" cy="1280160"/>
           </a:xfrm>
           <a:prstGeom prst="roundRect">
             <a:avLst>
@@ -6268,7 +6268,7 @@
         </p:nvSpPr>
         <p:spPr>
           <a:xfrm>
-            <a:off x="548640" y="2459736"/>
+            <a:off x="548640" y="2734056"/>
             <a:ext cx="566928" cy="566928"/>
           </a:xfrm>
           <a:prstGeom prst="roundRect">
@@ -6315,12 +6315,12 @@
         </p:nvSpPr>
         <p:spPr>
           <a:xfrm>
-            <a:off x="1344168" y="2109216"/>
-            <a:ext cx="1267968" cy="1267968"/>
+            <a:off x="1828800" y="2331720"/>
+            <a:ext cx="1371600" cy="1371600"/>
           </a:xfrm>
           <a:prstGeom prst="roundRect">
             <a:avLst>
-              <a:gd name="adj" fmla="val 10096"/>
+              <a:gd name="adj" fmla="val 9333"/>
             </a:avLst>
           </a:prstGeom>
           <a:solidFill>
@@ -6340,7 +6340,7 @@
               <a:buNone/>
             </a:pPr>
             <a:r>
-              <a:rPr lang="ko-KR" altLang="en-US" sz="5500" b="1" dirty="0">
+              <a:rPr lang="ko-KR" altLang="en-US" sz="5900" b="1" dirty="0">
                 <a:solidFill>
                   <a:srgbClr val="1F2937"/>
                 </a:solidFill>
@@ -6350,7 +6350,7 @@
               </a:rPr>
               <a:t>곰</a:t>
             </a:r>
-            <a:endParaRPr lang="ko-KR" sz="5500" dirty="0"/>
+            <a:endParaRPr lang="ko-KR" sz="5900" dirty="0"/>
           </a:p>
         </p:txBody>
       </p:sp>
@@ -6362,12 +6362,12 @@
         </p:nvSpPr>
         <p:spPr>
           <a:xfrm>
-            <a:off x="2813304" y="2109216"/>
-            <a:ext cx="1267968" cy="1267968"/>
+            <a:off x="3401568" y="2331720"/>
+            <a:ext cx="1371600" cy="1371600"/>
           </a:xfrm>
           <a:prstGeom prst="roundRect">
             <a:avLst>
-              <a:gd name="adj" fmla="val 10096"/>
+              <a:gd name="adj" fmla="val 9333"/>
             </a:avLst>
           </a:prstGeom>
           <a:solidFill>
@@ -6387,7 +6387,7 @@
               <a:buNone/>
             </a:pPr>
             <a:r>
-              <a:rPr lang="ko-KR" altLang="en-US" sz="5500" b="1" dirty="0">
+              <a:rPr lang="ko-KR" altLang="en-US" sz="5900" b="1" dirty="0">
                 <a:solidFill>
                   <a:srgbClr val="1F2937"/>
                 </a:solidFill>
@@ -6397,7 +6397,7 @@
               </a:rPr>
               <a:t>산</a:t>
             </a:r>
-            <a:endParaRPr lang="ko-KR" sz="5500" dirty="0"/>
+            <a:endParaRPr lang="ko-KR" sz="5900" dirty="0"/>
           </a:p>
         </p:txBody>
       </p:sp>
@@ -6409,12 +6409,12 @@
         </p:nvSpPr>
         <p:spPr>
           <a:xfrm>
-            <a:off x="4282440" y="2109216"/>
-            <a:ext cx="1267968" cy="1267968"/>
+            <a:off x="4974336" y="2331720"/>
+            <a:ext cx="1371600" cy="1371600"/>
           </a:xfrm>
           <a:prstGeom prst="roundRect">
             <a:avLst>
-              <a:gd name="adj" fmla="val 10096"/>
+              <a:gd name="adj" fmla="val 9333"/>
             </a:avLst>
           </a:prstGeom>
           <a:solidFill>
@@ -6434,7 +6434,7 @@
               <a:buNone/>
             </a:pPr>
             <a:r>
-              <a:rPr lang="ko-KR" altLang="en-US" sz="5500" b="1" dirty="0">
+              <a:rPr lang="ko-KR" altLang="en-US" sz="5900" b="1" dirty="0">
                 <a:solidFill>
                   <a:srgbClr val="1F2937"/>
                 </a:solidFill>
@@ -6444,7 +6444,7 @@
               </a:rPr>
               <a:t>밥</a:t>
             </a:r>
-            <a:endParaRPr lang="ko-KR" sz="5500" dirty="0"/>
+            <a:endParaRPr lang="ko-KR" sz="5900" dirty="0"/>
           </a:p>
         </p:txBody>
       </p:sp>
@@ -6456,7 +6456,7 @@
         </p:nvSpPr>
         <p:spPr>
           <a:xfrm>
-            <a:off x="548640" y="4654296"/>
+            <a:off x="548640" y="4928616"/>
             <a:ext cx="566928" cy="566928"/>
           </a:xfrm>
           <a:prstGeom prst="roundRect">
@@ -6503,12 +6503,12 @@
         </p:nvSpPr>
         <p:spPr>
           <a:xfrm>
-            <a:off x="1344168" y="4206240"/>
-            <a:ext cx="1965960" cy="1463040"/>
+            <a:off x="1344168" y="4343400"/>
+            <a:ext cx="2606040" cy="1737360"/>
           </a:xfrm>
           <a:prstGeom prst="roundRect">
             <a:avLst>
-              <a:gd name="adj" fmla="val 8750"/>
+              <a:gd name="adj" fmla="val 7368"/>
             </a:avLst>
           </a:prstGeom>
           <a:solidFill>
@@ -6550,12 +6550,12 @@
         </p:nvSpPr>
         <p:spPr>
           <a:xfrm>
-            <a:off x="3584448" y="4206240"/>
-            <a:ext cx="1965960" cy="1463040"/>
+            <a:off x="4224528" y="4343400"/>
+            <a:ext cx="2606040" cy="1737360"/>
           </a:xfrm>
           <a:prstGeom prst="roundRect">
             <a:avLst>
-              <a:gd name="adj" fmla="val 8750"/>
+              <a:gd name="adj" fmla="val 7368"/>
             </a:avLst>
           </a:prstGeom>
           <a:solidFill>
@@ -7961,7 +7961,7 @@
                         <a:buNone/>
                       </a:pPr>
                       <a:r>
-                        <a:rPr lang="en-US" sz="3200" b="1" dirty="0">
+                        <a:rPr lang="en-US" sz="4500" b="1" dirty="0">
                           <a:solidFill>
                             <a:srgbClr val="1F2937"/>
                           </a:solidFill>
@@ -7971,7 +7971,7 @@
                         </a:rPr>
                         <a:t>ㅏ</a:t>
                       </a:r>
-                      <a:endParaRPr lang="en-US" sz="3200" dirty="0">
+                      <a:endParaRPr lang="en-US" sz="4500" dirty="0">
                         <a:latin typeface="맑은 고딕" charset="0"/>
                         <a:ea typeface="맑은 고딕" charset="0"/>
                         <a:cs typeface="맑은 고딕" charset="0"/>
@@ -8029,7 +8029,7 @@
                         <a:buNone/>
                       </a:pPr>
                       <a:r>
-                        <a:rPr lang="en-US" sz="3200" b="1" dirty="0">
+                        <a:rPr lang="en-US" sz="4500" b="1" dirty="0">
                           <a:solidFill>
                             <a:srgbClr val="1F2937"/>
                           </a:solidFill>
@@ -8039,7 +8039,7 @@
                         </a:rPr>
                         <a:t>ㅗ</a:t>
                       </a:r>
-                      <a:endParaRPr lang="en-US" sz="3200" dirty="0">
+                      <a:endParaRPr lang="en-US" sz="4500" dirty="0">
                         <a:latin typeface="맑은 고딕" charset="0"/>
                         <a:ea typeface="맑은 고딕" charset="0"/>
                         <a:cs typeface="맑은 고딕" charset="0"/>
@@ -8097,7 +8097,7 @@
                         <a:buNone/>
                       </a:pPr>
                       <a:r>
-                        <a:rPr lang="en-US" sz="3200" b="1" dirty="0">
+                        <a:rPr lang="en-US" sz="4500" b="1" dirty="0">
                           <a:solidFill>
                             <a:srgbClr val="1F2937"/>
                           </a:solidFill>
@@ -8107,7 +8107,7 @@
                         </a:rPr>
                         <a:t>ㅜ</a:t>
                       </a:r>
-                      <a:endParaRPr lang="en-US" sz="3200" dirty="0">
+                      <a:endParaRPr lang="en-US" sz="4500" dirty="0">
                         <a:latin typeface="맑은 고딕" charset="0"/>
                         <a:ea typeface="맑은 고딕" charset="0"/>
                         <a:cs typeface="맑은 고딕" charset="0"/>
@@ -8165,7 +8165,7 @@
                         <a:buNone/>
                       </a:pPr>
                       <a:r>
-                        <a:rPr lang="en-US" sz="3200" b="1" dirty="0">
+                        <a:rPr lang="en-US" sz="4500" b="1" dirty="0">
                           <a:solidFill>
                             <a:srgbClr val="1F2937"/>
                           </a:solidFill>
@@ -8175,7 +8175,7 @@
                         </a:rPr>
                         <a:t>ㅣ</a:t>
                       </a:r>
-                      <a:endParaRPr lang="en-US" sz="3200" dirty="0">
+                      <a:endParaRPr lang="en-US" sz="4500" dirty="0">
                         <a:latin typeface="맑은 고딕" charset="0"/>
                         <a:ea typeface="맑은 고딕" charset="0"/>
                         <a:cs typeface="맑은 고딕" charset="0"/>
@@ -8235,7 +8235,7 @@
                         <a:buNone/>
                       </a:pPr>
                       <a:r>
-                        <a:rPr lang="en-US" sz="3200" b="1" dirty="0">
+                        <a:rPr lang="en-US" sz="4500" b="1" dirty="0">
                           <a:solidFill>
                             <a:srgbClr val="1F2937"/>
                           </a:solidFill>
@@ -8245,7 +8245,7 @@
                         </a:rPr>
                         <a:t>ㄲ</a:t>
                       </a:r>
-                      <a:endParaRPr lang="en-US" sz="3200" dirty="0">
+                      <a:endParaRPr lang="en-US" sz="4500" dirty="0">
                         <a:latin typeface="맑은 고딕" charset="0"/>
                         <a:ea typeface="맑은 고딕" charset="0"/>
                         <a:cs typeface="맑은 고딕" charset="0"/>
@@ -8577,7 +8577,7 @@
                         <a:buNone/>
                       </a:pPr>
                       <a:r>
-                        <a:rPr lang="en-US" sz="3200" b="1" dirty="0">
+                        <a:rPr lang="en-US" sz="4500" b="1" dirty="0">
                           <a:solidFill>
                             <a:srgbClr val="1F2937"/>
                           </a:solidFill>
@@ -8587,7 +8587,7 @@
                         </a:rPr>
                         <a:t>ㄸ</a:t>
                       </a:r>
-                      <a:endParaRPr lang="en-US" sz="3200" dirty="0">
+                      <a:endParaRPr lang="en-US" sz="4500" dirty="0">
                         <a:latin typeface="맑은 고딕" charset="0"/>
                         <a:ea typeface="맑은 고딕" charset="0"/>
                         <a:cs typeface="맑은 고딕" charset="0"/>
@@ -8919,7 +8919,7 @@
                         <a:buNone/>
                       </a:pPr>
                       <a:r>
-                        <a:rPr lang="en-US" sz="3200" b="1" dirty="0">
+                        <a:rPr lang="en-US" sz="4500" b="1" dirty="0">
                           <a:solidFill>
                             <a:srgbClr val="1F2937"/>
                           </a:solidFill>
@@ -8929,7 +8929,7 @@
                         </a:rPr>
                         <a:t>ㅃ</a:t>
                       </a:r>
-                      <a:endParaRPr lang="en-US" sz="3200" dirty="0">
+                      <a:endParaRPr lang="en-US" sz="4500" dirty="0">
                         <a:latin typeface="맑은 고딕" charset="0"/>
                         <a:ea typeface="맑은 고딕" charset="0"/>
                         <a:cs typeface="맑은 고딕" charset="0"/>
@@ -9261,7 +9261,7 @@
                         <a:buNone/>
                       </a:pPr>
                       <a:r>
-                        <a:rPr lang="en-US" sz="3200" b="1" dirty="0">
+                        <a:rPr lang="en-US" sz="4500" b="1" dirty="0">
                           <a:solidFill>
                             <a:srgbClr val="1F2937"/>
                           </a:solidFill>
@@ -9271,7 +9271,7 @@
                         </a:rPr>
                         <a:t>ㅆ</a:t>
                       </a:r>
-                      <a:endParaRPr lang="en-US" sz="3200" dirty="0">
+                      <a:endParaRPr lang="en-US" sz="4500" dirty="0">
                         <a:latin typeface="맑은 고딕" charset="0"/>
                         <a:ea typeface="맑은 고딕" charset="0"/>
                         <a:cs typeface="맑은 고딕" charset="0"/>
@@ -9603,7 +9603,7 @@
                         <a:buNone/>
                       </a:pPr>
                       <a:r>
-                        <a:rPr lang="en-US" sz="3200" b="1" dirty="0">
+                        <a:rPr lang="en-US" sz="4500" b="1" dirty="0">
                           <a:solidFill>
                             <a:srgbClr val="1F2937"/>
                           </a:solidFill>
@@ -9613,7 +9613,7 @@
                         </a:rPr>
                         <a:t>ㅉ</a:t>
                       </a:r>
-                      <a:endParaRPr lang="en-US" sz="3200" dirty="0">
+                      <a:endParaRPr lang="en-US" sz="4500" dirty="0">
                         <a:latin typeface="맑은 고딕" charset="0"/>
                         <a:ea typeface="맑은 고딕" charset="0"/>
                         <a:cs typeface="맑은 고딕" charset="0"/>

--- a/dist/초1/국어/한글/초1_국어_한글_05_쌍자음과여러가지모음.pptx
+++ b/dist/초1/국어/한글/초1_국어_한글_05_쌍자음과여러가지모음.pptx
@@ -120,13 +120,13 @@
   <p:extLst>
     <p:ext uri="{521415D9-36F7-43E2-AB2F-B90AF26B5E84}">
       <p14:sectionLst xmlns:p14="http://schemas.microsoft.com/office/powerpoint/2010/main">
-        <p14:section name="도입" id="{2fbc4982-c03c-23f0-d67b-b8eebdcc1fee}">
+        <p14:section name="도입" id="{7b2e6b29-cf74-0a4a-f167-6cfd7dffdcb1}">
           <p14:sldIdLst>
             <p14:sldId id="256"/>
             <p14:sldId id="257"/>
           </p14:sldIdLst>
         </p14:section>
-        <p14:section name="개념" id="{7bfd9449-5240-d949-e64b-ac6cb159a4bf}">
+        <p14:section name="개념" id="{c2971956-6d4e-e8b2-ca66-a1eaa23a4ace}">
           <p14:sldIdLst>
             <p14:sldId id="258"/>
             <p14:sldId id="259"/>
@@ -134,32 +134,32 @@
             <p14:sldId id="263"/>
           </p14:sldIdLst>
         </p14:section>
-        <p14:section name="연습" id="{58c8d5c2-f613-9f1f-8107-011f2f2347cd}">
+        <p14:section name="연습" id="{727626aa-5efe-15b9-6aba-22b313c35774}">
           <p14:sldIdLst>
             <p14:sldId id="260"/>
             <p14:sldId id="261"/>
             <p14:sldId id="264"/>
           </p14:sldIdLst>
         </p14:section>
-        <p14:section name="개념" id="{7490b911-4188-0014-c3ef-819eb0557735}">
+        <p14:section name="개념" id="{7d49c6ba-3f53-079b-04e1-33bac68ec453}">
           <p14:sldIdLst/>
         </p14:section>
-        <p14:section name="연습" id="{682738a0-a95f-4eeb-bbe7-356644af7adf}">
+        <p14:section name="연습" id="{baf0ab1e-97b7-bcb9-4ec2-f809f94baad0}">
           <p14:sldIdLst/>
         </p14:section>
-        <p14:section name="확인" id="{0224e71b-e518-0903-2b5d-239626b1e0b3}">
+        <p14:section name="확인" id="{f25b0df2-2725-5812-34de-511da5c6fc20}">
           <p14:sldIdLst>
             <p14:sldId id="265"/>
             <p14:sldId id="266"/>
             <p14:sldId id="267"/>
           </p14:sldIdLst>
         </p14:section>
-        <p14:section name="정리" id="{172323f7-aa78-a95f-847f-ada247fe1414}">
+        <p14:section name="정리" id="{d74afba4-b418-ba20-4215-65247a7fcf7e}">
           <p14:sldIdLst>
             <p14:sldId id="268"/>
           </p14:sldIdLst>
         </p14:section>
-        <p14:section name="보충" id="{1db717bd-b834-4449-313e-8ffa448346c1}">
+        <p14:section name="보충" id="{dce2f7fc-9c84-6614-b913-9342eac4ce45}">
           <p14:sldIdLst>
             <p14:sldId id="269"/>
           </p14:sldIdLst>
@@ -2949,7 +2949,7 @@
               <a:buNone/>
             </a:pPr>
             <a:r>
-              <a:rPr lang="ko-KR" altLang="en-US" sz="5000" b="1" dirty="0">
+              <a:rPr lang="ko-KR" altLang="en-US" sz="4400" b="1" dirty="0">
                 <a:solidFill>
                   <a:srgbClr val="FFFFFF"/>
                 </a:solidFill>
@@ -7880,7 +7880,7 @@
           </p:nvPr>
         </p:nvGraphicFramePr>
         <p:xfrm>
-          <a:off x="1979676" y="2164080"/>
+          <a:off x="1979676" y="2225040"/>
           <a:ext cx="8229600" cy="914400"/>
         </p:xfrm>
         <a:graphic>
@@ -7894,7 +7894,7 @@
                 <a:gridCol w="1645920"/>
                 <a:gridCol w="1645920"/>
               </a:tblGrid>
-              <a:tr h="650240">
+              <a:tr h="629920">
                 <a:tc>
                   <a:txBody>
                     <a:bodyPr/>
@@ -8225,7 +8225,7 @@
                   </a:tcPr>
                 </a:tc>
               </a:tr>
-              <a:tr h="650240">
+              <a:tr h="629920">
                 <a:tc>
                   <a:txBody>
                     <a:bodyPr/>
@@ -8567,7 +8567,7 @@
                   </a:tcPr>
                 </a:tc>
               </a:tr>
-              <a:tr h="650240">
+              <a:tr h="629920">
                 <a:tc>
                   <a:txBody>
                     <a:bodyPr/>
@@ -8909,7 +8909,7 @@
                   </a:tcPr>
                 </a:tc>
               </a:tr>
-              <a:tr h="650240">
+              <a:tr h="629920">
                 <a:tc>
                   <a:txBody>
                     <a:bodyPr/>
@@ -9251,7 +9251,7 @@
                   </a:tcPr>
                 </a:tc>
               </a:tr>
-              <a:tr h="650240">
+              <a:tr h="629920">
                 <a:tc>
                   <a:txBody>
                     <a:bodyPr/>
@@ -9593,7 +9593,7 @@
                   </a:tcPr>
                 </a:tc>
               </a:tr>
-              <a:tr h="650240">
+              <a:tr h="629920">
                 <a:tc>
                   <a:txBody>
                     <a:bodyPr/>
